--- a/PowerPointApi/AuxiTask.pptx
+++ b/PowerPointApi/AuxiTask.pptx
@@ -5,7 +5,7 @@
     <p:sldMasterId id="2147483648" r:id="rId1"/>
   </p:sldMasterIdLst>
   <p:sldIdLst>
-    <p:sldId id="256" r:id="rId2"/>
+    <p:sldId id="257" r:id="rId2"/>
   </p:sldIdLst>
   <p:sldSz cx="12192000" cy="6858000"/>
   <p:notesSz cx="6858000" cy="9144000"/>
@@ -243,7 +243,7 @@
           <a:p>
             <a:fld id="{245F50C0-8ACE-43D8-BFAC-30987ADFE5F1}" type="datetimeFigureOut">
               <a:rPr lang="en-US" smtClean="0"/>
-              <a:t>8/30/2024</a:t>
+              <a:t>8/31/2024</a:t>
             </a:fld>
             <a:endParaRPr lang="en-US"/>
           </a:p>
@@ -413,7 +413,7 @@
           <a:p>
             <a:fld id="{245F50C0-8ACE-43D8-BFAC-30987ADFE5F1}" type="datetimeFigureOut">
               <a:rPr lang="en-US" smtClean="0"/>
-              <a:t>8/30/2024</a:t>
+              <a:t>8/31/2024</a:t>
             </a:fld>
             <a:endParaRPr lang="en-US"/>
           </a:p>
@@ -593,7 +593,7 @@
           <a:p>
             <a:fld id="{245F50C0-8ACE-43D8-BFAC-30987ADFE5F1}" type="datetimeFigureOut">
               <a:rPr lang="en-US" smtClean="0"/>
-              <a:t>8/30/2024</a:t>
+              <a:t>8/31/2024</a:t>
             </a:fld>
             <a:endParaRPr lang="en-US"/>
           </a:p>
@@ -763,7 +763,7 @@
           <a:p>
             <a:fld id="{245F50C0-8ACE-43D8-BFAC-30987ADFE5F1}" type="datetimeFigureOut">
               <a:rPr lang="en-US" smtClean="0"/>
-              <a:t>8/30/2024</a:t>
+              <a:t>8/31/2024</a:t>
             </a:fld>
             <a:endParaRPr lang="en-US"/>
           </a:p>
@@ -1009,7 +1009,7 @@
           <a:p>
             <a:fld id="{245F50C0-8ACE-43D8-BFAC-30987ADFE5F1}" type="datetimeFigureOut">
               <a:rPr lang="en-US" smtClean="0"/>
-              <a:t>8/30/2024</a:t>
+              <a:t>8/31/2024</a:t>
             </a:fld>
             <a:endParaRPr lang="en-US"/>
           </a:p>
@@ -1241,7 +1241,7 @@
           <a:p>
             <a:fld id="{245F50C0-8ACE-43D8-BFAC-30987ADFE5F1}" type="datetimeFigureOut">
               <a:rPr lang="en-US" smtClean="0"/>
-              <a:t>8/30/2024</a:t>
+              <a:t>8/31/2024</a:t>
             </a:fld>
             <a:endParaRPr lang="en-US"/>
           </a:p>
@@ -1608,7 +1608,7 @@
           <a:p>
             <a:fld id="{245F50C0-8ACE-43D8-BFAC-30987ADFE5F1}" type="datetimeFigureOut">
               <a:rPr lang="en-US" smtClean="0"/>
-              <a:t>8/30/2024</a:t>
+              <a:t>8/31/2024</a:t>
             </a:fld>
             <a:endParaRPr lang="en-US"/>
           </a:p>
@@ -1726,7 +1726,7 @@
           <a:p>
             <a:fld id="{245F50C0-8ACE-43D8-BFAC-30987ADFE5F1}" type="datetimeFigureOut">
               <a:rPr lang="en-US" smtClean="0"/>
-              <a:t>8/30/2024</a:t>
+              <a:t>8/31/2024</a:t>
             </a:fld>
             <a:endParaRPr lang="en-US"/>
           </a:p>
@@ -1821,7 +1821,7 @@
           <a:p>
             <a:fld id="{245F50C0-8ACE-43D8-BFAC-30987ADFE5F1}" type="datetimeFigureOut">
               <a:rPr lang="en-US" smtClean="0"/>
-              <a:t>8/30/2024</a:t>
+              <a:t>8/31/2024</a:t>
             </a:fld>
             <a:endParaRPr lang="en-US"/>
           </a:p>
@@ -2098,7 +2098,7 @@
           <a:p>
             <a:fld id="{245F50C0-8ACE-43D8-BFAC-30987ADFE5F1}" type="datetimeFigureOut">
               <a:rPr lang="en-US" smtClean="0"/>
-              <a:t>8/30/2024</a:t>
+              <a:t>8/31/2024</a:t>
             </a:fld>
             <a:endParaRPr lang="en-US"/>
           </a:p>
@@ -2351,7 +2351,7 @@
           <a:p>
             <a:fld id="{245F50C0-8ACE-43D8-BFAC-30987ADFE5F1}" type="datetimeFigureOut">
               <a:rPr lang="en-US" smtClean="0"/>
-              <a:t>8/30/2024</a:t>
+              <a:t>8/31/2024</a:t>
             </a:fld>
             <a:endParaRPr lang="en-US"/>
           </a:p>
@@ -2564,7 +2564,7 @@
           <a:p>
             <a:fld id="{245F50C0-8ACE-43D8-BFAC-30987ADFE5F1}" type="datetimeFigureOut">
               <a:rPr lang="en-US" smtClean="0"/>
-              <a:t>8/30/2024</a:t>
+              <a:t>8/31/2024</a:t>
             </a:fld>
             <a:endParaRPr lang="en-US"/>
           </a:p>
@@ -2992,12 +2992,11 @@
           <a:p>
             <a:pPr algn="ctr"/>
             <a:r>
-              <a:rPr lang="en-US" smtClean="0">
+              <a:rPr lang="en-US" dirty="0">
                 <a:latin typeface="Beirut"/>
               </a:rPr>
               <a:t>Output Slide</a:t>
             </a:r>
-            <a:endParaRPr lang="en-US" dirty="0"/>
           </a:p>
         </p:txBody>
       </p:sp>
@@ -3016,7 +3015,7 @@
         <p:spPr>
           <a:xfrm>
             <a:off x="458569" y="1712339"/>
-            <a:ext cx="2009648" cy="1446936"/>
+            <a:ext cx="3000000" cy="1500000"/>
           </a:xfrm>
           <a:prstGeom prst="homePlate">
             <a:avLst/>
@@ -3044,6 +3043,7 @@
           <a:p>
             <a:pPr algn="ctr"/>
             <a:endParaRPr lang="en-US"/>
+            <a:t>Begin</a:t>
           </a:p>
         </p:txBody>
       </p:sp>
@@ -3061,8 +3061,8 @@
         </p:nvSpPr>
         <p:spPr>
           <a:xfrm>
-            <a:off x="2329069" y="1843119"/>
-            <a:ext cx="1785731" cy="1446936"/>
+            <a:off x="2329069" y="1712339"/>
+            <a:ext cx="3000000" cy="1500000"/>
           </a:xfrm>
           <a:prstGeom prst="chevron">
             <a:avLst/>
@@ -3094,6 +3094,7 @@
                 <a:schemeClr val="tx1"/>
               </a:solidFill>
             </a:endParaRPr>
+            <a:t>Step 1</a:t>
           </a:p>
         </p:txBody>
       </p:sp>
@@ -3111,8 +3112,8 @@
         </p:nvSpPr>
         <p:spPr>
           <a:xfrm>
-            <a:off x="4031975" y="1590261"/>
-            <a:ext cx="2009648" cy="1569014"/>
+            <a:off x="4031975" y="1712339"/>
+            <a:ext cx="3000000" cy="1500000"/>
           </a:xfrm>
           <a:prstGeom prst="chevron">
             <a:avLst/>
@@ -3144,6 +3145,7 @@
                 <a:schemeClr val="tx1"/>
               </a:solidFill>
             </a:endParaRPr>
+            <a:t>Step 2</a:t>
           </a:p>
         </p:txBody>
       </p:sp>
@@ -3161,8 +3163,8 @@
         </p:nvSpPr>
         <p:spPr>
           <a:xfrm>
-            <a:off x="6150379" y="1933088"/>
-            <a:ext cx="2635812" cy="1446936"/>
+            <a:off x="6150379" y="1712339"/>
+            <a:ext cx="3000000" cy="1500000"/>
           </a:xfrm>
           <a:prstGeom prst="chevron">
             <a:avLst/>
@@ -3194,146 +3196,7 @@
                 <a:schemeClr val="tx1"/>
               </a:solidFill>
             </a:endParaRPr>
-          </a:p>
-        </p:txBody>
-      </p:sp>
-      <p:sp>
-        <p:nvSpPr>
-          <p:cNvPr id="3" name="TextBox 2">
-            <a:extLst>
-              <a:ext uri="{FF2B5EF4-FFF2-40B4-BE49-F238E27FC236}">
-                <a16:creationId xmlns:a16="http://schemas.microsoft.com/office/drawing/2014/main" id="{4F099997-0C0C-45A9-835E-EF48E8FB23A0}"/>
-              </a:ext>
-            </a:extLst>
-          </p:cNvPr>
-          <p:cNvSpPr txBox="1"/>
-          <p:nvPr/>
-        </p:nvSpPr>
-        <p:spPr>
-          <a:xfrm>
-            <a:off x="568870" y="2074144"/>
-            <a:ext cx="1205948" cy="492443"/>
-          </a:xfrm>
-          <a:prstGeom prst="rect">
-            <a:avLst/>
-          </a:prstGeom>
-          <a:noFill/>
-        </p:spPr>
-        <p:txBody>
-          <a:bodyPr wrap="square" rtlCol="0">
-            <a:spAutoFit/>
-          </a:bodyPr>
-          <a:lstStyle/>
-          <a:p>
-            <a:r>
-              <a:rPr lang="en-US" sz="2600" dirty="0"/>
-              <a:t>Begin</a:t>
-            </a:r>
-          </a:p>
-        </p:txBody>
-      </p:sp>
-      <p:sp>
-        <p:nvSpPr>
-          <p:cNvPr id="4" name="TextBox 3">
-            <a:extLst>
-              <a:ext uri="{FF2B5EF4-FFF2-40B4-BE49-F238E27FC236}">
-                <a16:creationId xmlns:a16="http://schemas.microsoft.com/office/drawing/2014/main" id="{A8EB7680-6F98-40B2-8C21-4A86FF3A15FF}"/>
-              </a:ext>
-            </a:extLst>
-          </p:cNvPr>
-          <p:cNvSpPr txBox="1"/>
-          <p:nvPr/>
-        </p:nvSpPr>
-        <p:spPr>
-          <a:xfrm>
-            <a:off x="2670315" y="2435807"/>
-            <a:ext cx="1205948" cy="492443"/>
-          </a:xfrm>
-          <a:prstGeom prst="rect">
-            <a:avLst/>
-          </a:prstGeom>
-          <a:noFill/>
-        </p:spPr>
-        <p:txBody>
-          <a:bodyPr wrap="square" rtlCol="0">
-            <a:spAutoFit/>
-          </a:bodyPr>
-          <a:lstStyle/>
-          <a:p>
-            <a:r>
-              <a:rPr lang="en-US" sz="2600" dirty="0"/>
-              <a:t>Step 1</a:t>
-            </a:r>
-          </a:p>
-        </p:txBody>
-      </p:sp>
-      <p:sp>
-        <p:nvSpPr>
-          <p:cNvPr id="5" name="TextBox 4">
-            <a:extLst>
-              <a:ext uri="{FF2B5EF4-FFF2-40B4-BE49-F238E27FC236}">
-                <a16:creationId xmlns:a16="http://schemas.microsoft.com/office/drawing/2014/main" id="{D3600193-843C-4ED4-B1B7-FBEFE847CB11}"/>
-              </a:ext>
-            </a:extLst>
-          </p:cNvPr>
-          <p:cNvSpPr txBox="1"/>
-          <p:nvPr/>
-        </p:nvSpPr>
-        <p:spPr>
-          <a:xfrm>
-            <a:off x="4662824" y="2128546"/>
-            <a:ext cx="1205948" cy="492443"/>
-          </a:xfrm>
-          <a:prstGeom prst="rect">
-            <a:avLst/>
-          </a:prstGeom>
-          <a:noFill/>
-        </p:spPr>
-        <p:txBody>
-          <a:bodyPr wrap="square" rtlCol="0">
-            <a:spAutoFit/>
-          </a:bodyPr>
-          <a:lstStyle/>
-          <a:p>
-            <a:r>
-              <a:rPr lang="en-US" sz="2600" dirty="0"/>
-              <a:t>Step 2</a:t>
-            </a:r>
-          </a:p>
-        </p:txBody>
-      </p:sp>
-      <p:sp>
-        <p:nvSpPr>
-          <p:cNvPr id="6" name="TextBox 5">
-            <a:extLst>
-              <a:ext uri="{FF2B5EF4-FFF2-40B4-BE49-F238E27FC236}">
-                <a16:creationId xmlns:a16="http://schemas.microsoft.com/office/drawing/2014/main" id="{B3F25653-1887-419D-9BE6-DD64C123F14C}"/>
-              </a:ext>
-            </a:extLst>
-          </p:cNvPr>
-          <p:cNvSpPr txBox="1"/>
-          <p:nvPr/>
-        </p:nvSpPr>
-        <p:spPr>
-          <a:xfrm>
-            <a:off x="7002407" y="2618048"/>
-            <a:ext cx="1205948" cy="492443"/>
-          </a:xfrm>
-          <a:prstGeom prst="rect">
-            <a:avLst/>
-          </a:prstGeom>
-          <a:noFill/>
-        </p:spPr>
-        <p:txBody>
-          <a:bodyPr wrap="square" rtlCol="0">
-            <a:spAutoFit/>
-          </a:bodyPr>
-          <a:lstStyle/>
-          <a:p>
-            <a:r>
-              <a:rPr lang="en-US" sz="2600" dirty="0"/>
-              <a:t>Done</a:t>
-            </a:r>
+            <a:t>Done</a:t>
           </a:p>
         </p:txBody>
       </p:sp>
@@ -3370,7 +3233,9 @@
               <a:buChar char="•"/>
             </a:pPr>
             <a:r>
-              <a:rPr lang="en-US" i="1" dirty="0"/>
+              <a:rPr lang="en-US" b="0" i="1" dirty="0">
+                <a:latin typeface="Beirut"/>
+              </a:rPr>
               <a:t>Start here</a:t>
             </a:r>
           </a:p>
@@ -3380,7 +3245,9 @@
               <a:buChar char="•"/>
             </a:pPr>
             <a:r>
-              <a:rPr lang="en-US" i="1" dirty="0"/>
+              <a:rPr lang="en-US" b="0" i="1" dirty="0">
+                <a:latin typeface="Beirut"/>
+              </a:rPr>
               <a:t>Maybe not</a:t>
             </a:r>
           </a:p>
@@ -3390,7 +3257,9 @@
               <a:buChar char="•"/>
             </a:pPr>
             <a:r>
-              <a:rPr lang="en-US" i="1" dirty="0"/>
+              <a:rPr lang="en-US" b="0" i="1" dirty="0">
+                <a:latin typeface="Beirut"/>
+              </a:rPr>
               <a:t>Lobster roll</a:t>
             </a:r>
           </a:p>
@@ -3400,7 +3269,9 @@
               <a:buChar char="•"/>
             </a:pPr>
             <a:r>
-              <a:rPr lang="en-US" i="1" dirty="0"/>
+              <a:rPr lang="en-US" b="0" i="1" dirty="0">
+                <a:latin typeface="Beirut"/>
+              </a:rPr>
               <a:t>C#</a:t>
             </a:r>
           </a:p>
@@ -3420,7 +3291,7 @@
         </p:nvSpPr>
         <p:spPr>
           <a:xfrm>
-            <a:off x="1953637" y="3796190"/>
+            <a:off x="1953637" y="3700095"/>
             <a:ext cx="1527662" cy="1200329"/>
           </a:xfrm>
           <a:prstGeom prst="rect">
@@ -3436,40 +3307,48 @@
           <a:p>
             <a:pPr marL="285750" indent="-285750">
               <a:buFont typeface="Wingdings" pitchFamily="2" charset="2"/>
-              <a:buChar char="Ø"/>
+              <a:buChar char="•"/>
             </a:pPr>
             <a:r>
-              <a:rPr lang="en-US" i="1" dirty="0"/>
+              <a:rPr lang="en-US" b="0" i="1" dirty="0">
+                <a:latin typeface="Beirut"/>
+              </a:rPr>
               <a:t>Start here</a:t>
             </a:r>
           </a:p>
           <a:p>
             <a:pPr marL="285750" indent="-285750">
               <a:buFont typeface="Wingdings" pitchFamily="2" charset="2"/>
-              <a:buChar char="Ø"/>
+              <a:buChar char="•"/>
             </a:pPr>
             <a:r>
-              <a:rPr lang="en-US" i="1" dirty="0"/>
+              <a:rPr lang="en-US" b="0" i="1" dirty="0">
+                <a:latin typeface="Beirut"/>
+              </a:rPr>
               <a:t>Maybe not</a:t>
             </a:r>
           </a:p>
           <a:p>
             <a:pPr marL="285750" indent="-285750">
               <a:buFont typeface="Wingdings" pitchFamily="2" charset="2"/>
-              <a:buChar char="Ø"/>
+              <a:buChar char="•"/>
             </a:pPr>
             <a:r>
-              <a:rPr lang="en-US" i="1" dirty="0"/>
+              <a:rPr lang="en-US" b="0" i="1" dirty="0">
+                <a:latin typeface="Beirut"/>
+              </a:rPr>
               <a:t>Lobster roll</a:t>
             </a:r>
           </a:p>
           <a:p>
             <a:pPr marL="285750" indent="-285750">
               <a:buFont typeface="Wingdings" pitchFamily="2" charset="2"/>
-              <a:buChar char="Ø"/>
+              <a:buChar char="•"/>
             </a:pPr>
             <a:r>
-              <a:rPr lang="en-US" i="1" dirty="0"/>
+              <a:rPr lang="en-US" b="0" i="1" dirty="0">
+                <a:latin typeface="Beirut"/>
+              </a:rPr>
               <a:t>C#</a:t>
             </a:r>
           </a:p>
@@ -3489,8 +3368,8 @@
         </p:nvSpPr>
         <p:spPr>
           <a:xfrm>
-            <a:off x="3858886" y="3727913"/>
-            <a:ext cx="1571456" cy="1200329"/>
+            <a:off x="3858886" y="3700095"/>
+            <a:ext cx="1527662" cy="1200329"/>
           </a:xfrm>
           <a:prstGeom prst="rect">
             <a:avLst/>
@@ -3505,40 +3384,48 @@
           <a:p>
             <a:pPr marL="342900" indent="-342900">
               <a:buFont typeface="+mj-lt"/>
-              <a:buAutoNum type="arabicPeriod"/>
+              <a:buChar char="•"/>
             </a:pPr>
             <a:r>
-              <a:rPr lang="en-US" i="1" dirty="0"/>
+              <a:rPr lang="en-US" b="0" i="1" dirty="0">
+                <a:latin typeface="Beirut"/>
+              </a:rPr>
               <a:t>Start here</a:t>
             </a:r>
           </a:p>
           <a:p>
             <a:pPr marL="342900" indent="-342900">
               <a:buFont typeface="+mj-lt"/>
-              <a:buAutoNum type="arabicPeriod"/>
+              <a:buChar char="•"/>
             </a:pPr>
             <a:r>
-              <a:rPr lang="en-US" i="1" dirty="0"/>
+              <a:rPr lang="en-US" b="0" i="1" dirty="0">
+                <a:latin typeface="Beirut"/>
+              </a:rPr>
               <a:t>Maybe not</a:t>
             </a:r>
           </a:p>
           <a:p>
             <a:pPr marL="342900" indent="-342900">
               <a:buFont typeface="+mj-lt"/>
-              <a:buAutoNum type="arabicPeriod"/>
+              <a:buChar char="•"/>
             </a:pPr>
             <a:r>
-              <a:rPr lang="en-US" i="1" dirty="0"/>
+              <a:rPr lang="en-US" b="0" i="1" dirty="0">
+                <a:latin typeface="Beirut"/>
+              </a:rPr>
               <a:t>Lobster roll</a:t>
             </a:r>
           </a:p>
           <a:p>
             <a:pPr marL="342900" indent="-342900">
               <a:buFont typeface="+mj-lt"/>
-              <a:buAutoNum type="arabicPeriod"/>
+              <a:buChar char="•"/>
             </a:pPr>
             <a:r>
-              <a:rPr lang="en-US" i="1" dirty="0"/>
+              <a:rPr lang="en-US" b="0" i="1" dirty="0">
+                <a:latin typeface="Beirut"/>
+              </a:rPr>
               <a:t>C#</a:t>
             </a:r>
           </a:p>
@@ -3558,8 +3445,8 @@
         </p:nvSpPr>
         <p:spPr>
           <a:xfrm>
-            <a:off x="6150379" y="3795451"/>
-            <a:ext cx="1544525" cy="1200329"/>
+            <a:off x="6150379" y="3700095"/>
+            <a:ext cx="1527662" cy="1200329"/>
           </a:xfrm>
           <a:prstGeom prst="rect">
             <a:avLst/>
@@ -3577,7 +3464,9 @@
               <a:buChar char="•"/>
             </a:pPr>
             <a:r>
-              <a:rPr lang="en-US" b="1" u="sng" dirty="0"/>
+              <a:rPr lang="en-US" b="0" dirty="0">
+                <a:latin typeface="Beirut"/>
+              </a:rPr>
               <a:t>Start here</a:t>
             </a:r>
           </a:p>
@@ -3587,7 +3476,9 @@
               <a:buChar char="•"/>
             </a:pPr>
             <a:r>
-              <a:rPr lang="en-US" b="1" u="sng" dirty="0"/>
+              <a:rPr lang="en-US" b="0" dirty="0">
+                <a:latin typeface="Beirut"/>
+              </a:rPr>
               <a:t>Maybe not</a:t>
             </a:r>
           </a:p>
@@ -3597,7 +3488,9 @@
               <a:buChar char="•"/>
             </a:pPr>
             <a:r>
-              <a:rPr lang="en-US" b="1" u="sng" dirty="0"/>
+              <a:rPr lang="en-US" b="0" dirty="0">
+                <a:latin typeface="Beirut"/>
+              </a:rPr>
               <a:t>Lobster roll</a:t>
             </a:r>
           </a:p>
@@ -3607,7 +3500,9 @@
               <a:buChar char="•"/>
             </a:pPr>
             <a:r>
-              <a:rPr lang="en-US" b="1" u="sng" dirty="0"/>
+              <a:rPr lang="en-US" b="0" dirty="0">
+                <a:latin typeface="Beirut"/>
+              </a:rPr>
               <a:t>C#</a:t>
             </a:r>
           </a:p>
@@ -3616,7 +3511,7 @@
     </p:spTree>
     <p:extLst>
       <p:ext uri="{BB962C8B-B14F-4D97-AF65-F5344CB8AC3E}">
-        <p14:creationId xmlns:p14="http://schemas.microsoft.com/office/powerpoint/2010/main" val="44191711"/>
+        <p14:creationId xmlns:p14="http://schemas.microsoft.com/office/powerpoint/2010/main" val="4076753257"/>
       </p:ext>
     </p:extLst>
   </p:cSld>
